--- a/pitch-deck-filled.pptx
+++ b/pitch-deck-filled.pptx
@@ -4857,7 +4857,7 @@
         </p:blipFill>
         <p:spPr>
           <a:xfrm>
-            <a:off x="5496187" y="2260397"/>
+            <a:off x="5496187" y="2279853"/>
             <a:ext cx="1005887" cy="1253719"/>
           </a:xfrm>
           <a:prstGeom prst="rect">

--- a/pitch-deck-filled.pptx
+++ b/pitch-deck-filled.pptx
@@ -4320,8 +4320,8 @@
         </p:nvSpPr>
         <p:spPr>
           <a:xfrm>
-            <a:off x="777240" y="4141856"/>
-            <a:ext cx="3017520" cy="822960"/>
+            <a:off x="501015" y="4141856"/>
+            <a:ext cx="3569970" cy="822960"/>
           </a:xfrm>
           <a:prstGeom prst="rect">
             <a:avLst/>
@@ -4333,24 +4333,19 @@
           <a:bodyPr wrap="square" rtlCol="0" anchor="t"/>
           <a:lstStyle/>
           <a:p>
-            <a:pPr marL="0" indent="0" algn="ctr">
+            <a:pPr algn="ctr">
               <a:lnSpc>
                 <a:spcPct val="105000"/>
               </a:lnSpc>
-              <a:buNone/>
             </a:pPr>
             <a:r>
               <a:rPr lang="en-US" sz="1100" dirty="0">
                 <a:solidFill>
                   <a:srgbClr val="8A97AD"/>
                 </a:solidFill>
-                <a:latin typeface="Segoe UI" pitchFamily="34" charset="0"/>
-                <a:ea typeface="Segoe UI" pitchFamily="34" charset="-122"/>
-                <a:cs typeface="Segoe UI" pitchFamily="34" charset="-120"/>
-              </a:rPr>
-              <a:t>Ex-vertical-SaaS operator; scaled a regulated product to 8 figures ARR.</a:t>
-            </a:r>
-            <a:endParaRPr lang="en-US" sz="1100" dirty="0"/>
+              </a:rPr>
+              <a:t>Founder &amp; CEO at TASKIT | Creating enterprise-grade work management software for modern businesses.</a:t>
+            </a:r>
           </a:p>
         </p:txBody>
       </p:sp>
@@ -4649,7 +4644,7 @@
                 <a:ea typeface="Segoe UI" pitchFamily="34" charset="-122"/>
                 <a:cs typeface="Segoe UI" pitchFamily="34" charset="-120"/>
               </a:rPr>
-              <a:t>Sold into hospitals, EMS and finance; closed the first design partners.</a:t>
+              <a:t>Sold into ERP, EMS and finance; closed the first design partners.</a:t>
             </a:r>
             <a:endParaRPr lang="en-US" sz="1100" dirty="0"/>
           </a:p>
@@ -4894,7 +4889,7 @@
         </p:blipFill>
         <p:spPr>
           <a:xfrm>
-            <a:off x="9200896" y="2233330"/>
+            <a:off x="9200896" y="2270654"/>
             <a:ext cx="977375" cy="1290514"/>
           </a:xfrm>
           <a:prstGeom prst="rect">
